--- a/classes/parte-10-seguridad-en-la-nube-y-contenedores/223-seguridad-en-aws/clase-223-presentacion.pptx
+++ b/classes/parte-10-seguridad-en-la-nube-y-contenedores/223-seguridad-en-aws/clase-223-presentacion.pptx
@@ -17,6 +17,10 @@
     <p:sldId id="265" r:id="rId16"/>
     <p:sldId id="266" r:id="rId17"/>
     <p:sldId id="267" r:id="rId18"/>
+    <p:sldId id="268" r:id="rId19"/>
+    <p:sldId id="269" r:id="rId20"/>
+    <p:sldId id="270" r:id="rId21"/>
+    <p:sldId id="271" r:id="rId22"/>
   </p:sldIdLst>
   <p:sldSz cx="9144000" cy="6858000" type="screen4x3"/>
   <p:notesSz cx="6858000" cy="9144000"/>
@@ -3198,7 +3202,7 @@
                   <a:srgbClr val="0B3D2E"/>
                 </a:solidFill>
               </a:rPr>
-              <a:t>⚠️ Errores comunes</a:t>
+              <a:t>🧪 Laboratorio guiado</a:t>
             </a:r>
           </a:p>
         </p:txBody>
@@ -3236,67 +3240,97 @@
                   <a:srgbClr val="22282E"/>
                 </a:solidFill>
               </a:rPr>
-              <a:t>•  Bucket "public" pese a política privada — ACL heredada o BPA desactivado; activa Block Public Access a nivel de cuenta.</a:t>
-            </a:r>
-          </a:p>
-          <a:p>
-            <a:pPr>
-              <a:spcAft>
-                <a:spcPts val="600"/>
-              </a:spcAft>
-            </a:pPr>
-            <a:r>
-              <a:rPr sz="1500">
-                <a:solidFill>
-                  <a:srgbClr val="22282E"/>
-                </a:solidFill>
-              </a:rPr>
-              <a:t>•  SG "no funciona" al denegar un puerto — Los SG solo permiten; para deny explícito usa NACL a nivel de subred.</a:t>
-            </a:r>
-          </a:p>
-          <a:p>
-            <a:pPr>
-              <a:spcAft>
-                <a:spcPts val="600"/>
-              </a:spcAft>
-            </a:pPr>
-            <a:r>
-              <a:rPr sz="1500">
-                <a:solidFill>
-                  <a:srgbClr val="22282E"/>
-                </a:solidFill>
-              </a:rPr>
-              <a:t>•  GuardDuty sin hallazgos aunque hay actividad — Solo cubre la región activada; habilítalo en todas las regiones usadas.</a:t>
-            </a:r>
-          </a:p>
-          <a:p>
-            <a:pPr>
-              <a:spcAft>
-                <a:spcPts val="600"/>
-              </a:spcAft>
-            </a:pPr>
-            <a:r>
-              <a:rPr sz="1500">
-                <a:solidFill>
-                  <a:srgbClr val="22282E"/>
-                </a:solidFill>
-              </a:rPr>
-              <a:t>•  CloudTrail sin registros históricos — Solo captura desde su creación; créalo antes de necesitarlo, multi-región.</a:t>
-            </a:r>
-          </a:p>
-          <a:p>
-            <a:pPr>
-              <a:spcAft>
-                <a:spcPts val="600"/>
-              </a:spcAft>
-            </a:pPr>
-            <a:r>
-              <a:rPr sz="1500">
-                <a:solidFill>
-                  <a:srgbClr val="22282E"/>
-                </a:solidFill>
-              </a:rPr>
-              <a:t>•  AccessDenied al usar una clave KMS — Falta permiso en la política de la clave; añade el principal a kms:Decrypt.</a:t>
+              <a:t>•  Crea una VPC con una subred pública (con Internet Gateway) y una privada (sin ruta directa a Internet).</a:t>
+            </a:r>
+          </a:p>
+          <a:p>
+            <a:pPr>
+              <a:spcAft>
+                <a:spcPts val="600"/>
+              </a:spcAft>
+            </a:pPr>
+            <a:r>
+              <a:rPr sz="1500">
+                <a:solidFill>
+                  <a:srgbClr val="22282E"/>
+                </a:solidFill>
+              </a:rPr>
+              <a:t>•  Lanza una instancia en la subred privada y comprueba que no es accesible desde Internet; da acceso solo vía un bastión o SSM Session Manager.</a:t>
+            </a:r>
+          </a:p>
+          <a:p>
+            <a:pPr>
+              <a:spcAft>
+                <a:spcPts val="600"/>
+              </a:spcAft>
+            </a:pPr>
+            <a:r>
+              <a:rPr sz="1500">
+                <a:solidFill>
+                  <a:srgbClr val="22282E"/>
+                </a:solidFill>
+              </a:rPr>
+              <a:t>•  Crea un bucket S3, sube un objeto y verifica que Block Public Access está activo a nivel de cuenta y bucket. Intenta hacerlo público y confirma que se bloquea.</a:t>
+            </a:r>
+          </a:p>
+          <a:p>
+            <a:pPr>
+              <a:spcAft>
+                <a:spcPts val="600"/>
+              </a:spcAft>
+            </a:pPr>
+            <a:r>
+              <a:rPr sz="1500">
+                <a:solidFill>
+                  <a:srgbClr val="22282E"/>
+                </a:solidFill>
+              </a:rPr>
+              <a:t>•  Activa cifrado por defecto con una clave KMS gestionada por ti y revisa la política de la clave.</a:t>
+            </a:r>
+          </a:p>
+          <a:p>
+            <a:pPr>
+              <a:spcAft>
+                <a:spcPts val="600"/>
+              </a:spcAft>
+            </a:pPr>
+            <a:r>
+              <a:rPr sz="1500">
+                <a:solidFill>
+                  <a:srgbClr val="22282E"/>
+                </a:solidFill>
+              </a:rPr>
+              <a:t>•  Habilita CloudTrail multi-región con un bucket dedicado y cifrado, y VPC Flow Logs hacia CloudWatch.</a:t>
+            </a:r>
+          </a:p>
+          <a:p>
+            <a:pPr>
+              <a:spcAft>
+                <a:spcPts val="600"/>
+              </a:spcAft>
+            </a:pPr>
+            <a:r>
+              <a:rPr sz="1500">
+                <a:solidFill>
+                  <a:srgbClr val="22282E"/>
+                </a:solidFill>
+              </a:rPr>
+              <a:t>•  Activa GuardDuty, Config (con reglas gestionadas) y Security Hub con el estándar CIS.</a:t>
+            </a:r>
+          </a:p>
+          <a:p>
+            <a:pPr>
+              <a:spcAft>
+                <a:spcPts val="600"/>
+              </a:spcAft>
+            </a:pPr>
+            <a:r>
+              <a:rPr sz="1500">
+                <a:solidFill>
+                  <a:srgbClr val="22282E"/>
+                </a:solidFill>
+              </a:rPr>
+              <a:t>•  Ejecuta prowler aws --compliance cis2.0aws y compara los hallazgos con lo que muestra Security Hub. Corrige al menos tres hallazgos de severidad alta y vuelve a ejecutar.</a:t>
             </a:r>
           </a:p>
         </p:txBody>
@@ -3347,7 +3381,7 @@
                   <a:srgbClr val="0B3D2E"/>
                 </a:solidFill>
               </a:rPr>
-              <a:t>❓ Preguntas frecuentes</a:t>
+              <a:t>✍️ Ejercicios</a:t>
             </a:r>
           </a:p>
         </p:txBody>
@@ -3385,82 +3419,82 @@
                   <a:srgbClr val="22282E"/>
                 </a:solidFill>
               </a:rPr>
-              <a:t>•  ❓ ¿Security Group o NACL?</a:t>
-            </a:r>
-          </a:p>
-          <a:p>
-            <a:pPr>
-              <a:spcAft>
-                <a:spcPts val="600"/>
-              </a:spcAft>
-            </a:pPr>
-            <a:r>
-              <a:rPr sz="1500">
-                <a:solidFill>
-                  <a:srgbClr val="22282E"/>
-                </a:solidFill>
-              </a:rPr>
-              <a:t>•  Usa ambos. El SG es stateful y va en la instancia (control fino); el NACL es stateless, va en la subred y sirve para bloqueos amplios (deny) que el SG no puede expresar.</a:t>
-            </a:r>
-          </a:p>
-          <a:p>
-            <a:pPr>
-              <a:spcAft>
-                <a:spcPts val="600"/>
-              </a:spcAft>
-            </a:pPr>
-            <a:r>
-              <a:rPr sz="1500">
-                <a:solidFill>
-                  <a:srgbClr val="22282E"/>
-                </a:solidFill>
-              </a:rPr>
-              <a:t>•  ❓ ¿GuardDuty reemplaza a un SIEM?</a:t>
-            </a:r>
-          </a:p>
-          <a:p>
-            <a:pPr>
-              <a:spcAft>
-                <a:spcPts val="600"/>
-              </a:spcAft>
-            </a:pPr>
-            <a:r>
-              <a:rPr sz="1500">
-                <a:solidFill>
-                  <a:srgbClr val="22282E"/>
-                </a:solidFill>
-              </a:rPr>
-              <a:t>•  No. GuardDuty detecta amenazas conocidas a partir de los logs de AWS; un SIEM correlaciona múltiples fuentes. Lo habitual es enviar los hallazgos de GuardDuty al SIEM.</a:t>
-            </a:r>
-          </a:p>
-          <a:p>
-            <a:pPr>
-              <a:spcAft>
-                <a:spcPts val="600"/>
-              </a:spcAft>
-            </a:pPr>
-            <a:r>
-              <a:rPr sz="1500">
-                <a:solidFill>
-                  <a:srgbClr val="22282E"/>
-                </a:solidFill>
-              </a:rPr>
-              <a:t>•  ❓ ¿Debo usar claves gestionadas por AWS o por el cliente (CMK)?</a:t>
-            </a:r>
-          </a:p>
-          <a:p>
-            <a:pPr>
-              <a:spcAft>
-                <a:spcPts val="600"/>
-              </a:spcAft>
-            </a:pPr>
-            <a:r>
-              <a:rPr sz="1500">
-                <a:solidFill>
-                  <a:srgbClr val="22282E"/>
-                </a:solidFill>
-              </a:rPr>
-              <a:t>•  Para control de auditoría, rotación y separación de deberes, usa claves gestionadas por el cliente (CMK). Las gestionadas por AWS son cómodas pero dan menos control sobre la política.</a:t>
+              <a:t>•  Escribe una regla de security group que permita SSH solo desde tu IP y HTTPS desde cualquier origen.</a:t>
+            </a:r>
+          </a:p>
+          <a:p>
+            <a:pPr>
+              <a:spcAft>
+                <a:spcPts val="600"/>
+              </a:spcAft>
+            </a:pPr>
+            <a:r>
+              <a:rPr sz="1500">
+                <a:solidFill>
+                  <a:srgbClr val="22282E"/>
+                </a:solidFill>
+              </a:rPr>
+              <a:t>•  Crea una política de bucket que exija cifrado en las peticiones PutObject.</a:t>
+            </a:r>
+          </a:p>
+          <a:p>
+            <a:pPr>
+              <a:spcAft>
+                <a:spcPts val="600"/>
+              </a:spcAft>
+            </a:pPr>
+            <a:r>
+              <a:rPr sz="1500">
+                <a:solidFill>
+                  <a:srgbClr val="22282E"/>
+                </a:solidFill>
+              </a:rPr>
+              <a:t>•  Configura una regla de Config que marque como no conforme cualquier volumen EBS sin cifrar.</a:t>
+            </a:r>
+          </a:p>
+          <a:p>
+            <a:pPr>
+              <a:spcAft>
+                <a:spcPts val="600"/>
+              </a:spcAft>
+            </a:pPr>
+            <a:r>
+              <a:rPr sz="1500">
+                <a:solidFill>
+                  <a:srgbClr val="22282E"/>
+                </a:solidFill>
+              </a:rPr>
+              <a:t>•  Interpreta un hallazgo de GuardDuty de tipo UnauthorizedAccess:IAMUser/InstanceCredentialExfiltration.</a:t>
+            </a:r>
+          </a:p>
+          <a:p>
+            <a:pPr>
+              <a:spcAft>
+                <a:spcPts val="600"/>
+              </a:spcAft>
+            </a:pPr>
+            <a:r>
+              <a:rPr sz="1500">
+                <a:solidFill>
+                  <a:srgbClr val="22282E"/>
+                </a:solidFill>
+              </a:rPr>
+              <a:t>•  Diseña una arquitectura de cuentas con una cuenta de logging centralizado.</a:t>
+            </a:r>
+          </a:p>
+          <a:p>
+            <a:pPr>
+              <a:spcAft>
+                <a:spcPts val="600"/>
+              </a:spcAft>
+            </a:pPr>
+            <a:r>
+              <a:rPr sz="1500">
+                <a:solidFill>
+                  <a:srgbClr val="22282E"/>
+                </a:solidFill>
+              </a:rPr>
+              <a:t>•  Habilita el acceso a instancias vía SSM en lugar de SSH y explica la ventaja de seguridad.</a:t>
             </a:r>
           </a:p>
         </p:txBody>
@@ -3511,7 +3545,7 @@
                   <a:srgbClr val="0B3D2E"/>
                 </a:solidFill>
               </a:rPr>
-              <a:t>🔗 Referencias</a:t>
+              <a:t>📝 Reto verificable</a:t>
             </a:r>
           </a:p>
         </p:txBody>
@@ -3549,71 +3583,623 @@
                   <a:srgbClr val="22282E"/>
                 </a:solidFill>
               </a:rPr>
-              <a:t>•  AWS Well-Architected — Security Pillar. &lt;https://docs.aws.amazon.com/wellarchitected/latest/security-pillar/welcome.html&gt;</a:t>
-            </a:r>
-          </a:p>
-          <a:p>
-            <a:pPr>
-              <a:spcAft>
-                <a:spcPts val="600"/>
-              </a:spcAft>
-            </a:pPr>
-            <a:r>
-              <a:rPr sz="1500">
-                <a:solidFill>
-                  <a:srgbClr val="22282E"/>
-                </a:solidFill>
-              </a:rPr>
-              <a:t>•  CIS Amazon Web Services Foundations Benchmark. &lt;https://www.cisecurity.org/benchmark/amazonwebservices&gt;</a:t>
-            </a:r>
-          </a:p>
-          <a:p>
-            <a:pPr>
-              <a:spcAft>
-                <a:spcPts val="600"/>
-              </a:spcAft>
-            </a:pPr>
-            <a:r>
-              <a:rPr sz="1500">
-                <a:solidFill>
-                  <a:srgbClr val="22282E"/>
-                </a:solidFill>
-              </a:rPr>
-              <a:t>•  Amazon S3 — Blocking public access. &lt;https://docs.aws.amazon.com/AmazonS3/latest/userguide/access-control-block-public-access.html&gt;</a:t>
-            </a:r>
-          </a:p>
-          <a:p>
-            <a:pPr>
-              <a:spcAft>
-                <a:spcPts val="600"/>
-              </a:spcAft>
-            </a:pPr>
-            <a:r>
-              <a:rPr sz="1500">
-                <a:solidFill>
-                  <a:srgbClr val="22282E"/>
-                </a:solidFill>
-              </a:rPr>
-              <a:t>•  Amazon GuardDuty docs. &lt;https://docs.aws.amazon.com/guardduty/&gt;</a:t>
-            </a:r>
-          </a:p>
-          <a:p>
-            <a:pPr>
-              <a:spcAft>
-                <a:spcPts val="600"/>
-              </a:spcAft>
-            </a:pPr>
-            <a:r>
-              <a:rPr sz="1500">
-                <a:solidFill>
-                  <a:srgbClr val="22282E"/>
-                </a:solidFill>
-              </a:rPr>
-              <a:t>•  Prowler. &lt;https://github.com/prowler-cloud/prowler&gt;</a:t>
-            </a:r>
-          </a:p>
-        </p:txBody>
-      </p:sp>
+              <a:t>•  Toma una cuenta de laboratorio "recién creada" y llévala a una postura base: sin buckets públicos,</a:t>
+            </a:r>
+          </a:p>
+          <a:p>
+            <a:pPr>
+              <a:spcAft>
+                <a:spcPts val="600"/>
+              </a:spcAft>
+            </a:pPr>
+            <a:r>
+              <a:rPr sz="1500">
+                <a:solidFill>
+                  <a:srgbClr val="22282E"/>
+                </a:solidFill>
+              </a:rPr>
+              <a:t>•  CloudTrail multi-región activo, GuardDuty y Security Hub habilitados, y cifrado por defecto en S3 y EBS.</a:t>
+            </a:r>
+          </a:p>
+          <a:p>
+            <a:pPr>
+              <a:spcAft>
+                <a:spcPts val="600"/>
+              </a:spcAft>
+            </a:pPr>
+            <a:r>
+              <a:rPr sz="1500">
+                <a:solidFill>
+                  <a:srgbClr val="22282E"/>
+                </a:solidFill>
+              </a:rPr>
+              <a:t>•  Criterio de aceptación: una ejecución de prowler aws --compliance cis2.0aws muestra 0</a:t>
+            </a:r>
+          </a:p>
+          <a:p>
+            <a:pPr>
+              <a:spcAft>
+                <a:spcPts val="600"/>
+              </a:spcAft>
+            </a:pPr>
+            <a:r>
+              <a:rPr sz="1500">
+                <a:solidFill>
+                  <a:srgbClr val="22282E"/>
+                </a:solidFill>
+              </a:rPr>
+              <a:t>•  hallazgos críticos/altos en las secciones de S3, logging y cifrado, y Security Hub reporta esos</a:t>
+            </a:r>
+          </a:p>
+          <a:p>
+            <a:pPr>
+              <a:spcAft>
+                <a:spcPts val="600"/>
+              </a:spcAft>
+            </a:pPr>
+            <a:r>
+              <a:rPr sz="1500">
+                <a:solidFill>
+                  <a:srgbClr val="22282E"/>
+                </a:solidFill>
+              </a:rPr>
+              <a:t>•  controles como PASSED.</a:t>
+            </a:r>
+          </a:p>
+        </p:txBody>
+      </p:sp>
+    </p:spTree>
+  </p:cSld>
+  <p:clrMapOvr>
+    <a:masterClrMapping/>
+  </p:clrMapOvr>
+</p:sld>
+</file>
+
+<file path=ppt/slides/slide13.xml><?xml version="1.0" encoding="utf-8"?>
+<p:sld xmlns:a="http://schemas.openxmlformats.org/drawingml/2006/main" xmlns:p="http://schemas.openxmlformats.org/presentationml/2006/main" xmlns:r="http://schemas.openxmlformats.org/officeDocument/2006/relationships">
+  <p:cSld>
+    <p:spTree>
+      <p:nvGrpSpPr>
+        <p:cNvPr id="1" name=""/>
+        <p:cNvGrpSpPr/>
+        <p:nvPr/>
+      </p:nvGrpSpPr>
+      <p:grpSpPr/>
+      <p:sp>
+        <p:nvSpPr>
+          <p:cNvPr id="2" name="TextBox 1"/>
+          <p:cNvSpPr txBox="1"/>
+          <p:nvPr/>
+        </p:nvSpPr>
+        <p:spPr>
+          <a:xfrm>
+            <a:off x="457200" y="320040"/>
+            <a:ext cx="8229600" cy="822960"/>
+          </a:xfrm>
+          <a:prstGeom prst="rect">
+            <a:avLst/>
+          </a:prstGeom>
+          <a:noFill/>
+        </p:spPr>
+        <p:txBody>
+          <a:bodyPr wrap="square">
+            <a:spAutoFit/>
+          </a:bodyPr>
+          <a:lstStyle/>
+          <a:p>
+            <a:r>
+              <a:rPr sz="2600" b="1">
+                <a:solidFill>
+                  <a:srgbClr val="0B3D2E"/>
+                </a:solidFill>
+              </a:rPr>
+              <a:t>⚠️ Errores comunes</a:t>
+            </a:r>
+          </a:p>
+        </p:txBody>
+      </p:sp>
+      <p:sp>
+        <p:nvSpPr>
+          <p:cNvPr id="3" name="TextBox 2"/>
+          <p:cNvSpPr txBox="1"/>
+          <p:nvPr/>
+        </p:nvSpPr>
+        <p:spPr>
+          <a:xfrm>
+            <a:off x="457200" y="1280160"/>
+            <a:ext cx="8229600" cy="4937760"/>
+          </a:xfrm>
+          <a:prstGeom prst="rect">
+            <a:avLst/>
+          </a:prstGeom>
+          <a:noFill/>
+        </p:spPr>
+        <p:txBody>
+          <a:bodyPr wrap="square">
+            <a:spAutoFit/>
+          </a:bodyPr>
+          <a:lstStyle/>
+          <a:p>
+            <a:pPr>
+              <a:spcAft>
+                <a:spcPts val="600"/>
+              </a:spcAft>
+            </a:pPr>
+            <a:r>
+              <a:rPr sz="1500">
+                <a:solidFill>
+                  <a:srgbClr val="22282E"/>
+                </a:solidFill>
+              </a:rPr>
+              <a:t>•  Bucket "public" pese a política privada — ACL heredada o BPA desactivado; activa Block Public Access a nivel de cuenta.</a:t>
+            </a:r>
+          </a:p>
+          <a:p>
+            <a:pPr>
+              <a:spcAft>
+                <a:spcPts val="600"/>
+              </a:spcAft>
+            </a:pPr>
+            <a:r>
+              <a:rPr sz="1500">
+                <a:solidFill>
+                  <a:srgbClr val="22282E"/>
+                </a:solidFill>
+              </a:rPr>
+              <a:t>•  SG "no funciona" al denegar un puerto — Los SG solo permiten; para deny explícito usa NACL a nivel de subred.</a:t>
+            </a:r>
+          </a:p>
+          <a:p>
+            <a:pPr>
+              <a:spcAft>
+                <a:spcPts val="600"/>
+              </a:spcAft>
+            </a:pPr>
+            <a:r>
+              <a:rPr sz="1500">
+                <a:solidFill>
+                  <a:srgbClr val="22282E"/>
+                </a:solidFill>
+              </a:rPr>
+              <a:t>•  GuardDuty sin hallazgos aunque hay actividad — Un hallazgo depende de región, plan, fuente y lógica de detección. Verifica cobertura sin asumir que toda actividad genera alerta.</a:t>
+            </a:r>
+          </a:p>
+          <a:p>
+            <a:pPr>
+              <a:spcAft>
+                <a:spcPts val="600"/>
+              </a:spcAft>
+            </a:pPr>
+            <a:r>
+              <a:rPr sz="1500">
+                <a:solidFill>
+                  <a:srgbClr val="22282E"/>
+                </a:solidFill>
+              </a:rPr>
+              <a:t>•  El trail no contiene el evento esperado — Revisa región, categoría, selector y fecha. Event history aporta ciertos management events recientes, pero no reemplaza un trail organizacional y su…</a:t>
+            </a:r>
+          </a:p>
+          <a:p>
+            <a:pPr>
+              <a:spcAft>
+                <a:spcPts val="600"/>
+              </a:spcAft>
+            </a:pPr>
+            <a:r>
+              <a:rPr sz="1500">
+                <a:solidFill>
+                  <a:srgbClr val="22282E"/>
+                </a:solidFill>
+              </a:rPr>
+              <a:t>•  AccessDenied al usar una clave KMS — Falta permiso en la política de la clave; añade el principal a kms:Decrypt.</a:t>
+            </a:r>
+          </a:p>
+        </p:txBody>
+      </p:sp>
+    </p:spTree>
+  </p:cSld>
+  <p:clrMapOvr>
+    <a:masterClrMapping/>
+  </p:clrMapOvr>
+</p:sld>
+</file>
+
+<file path=ppt/slides/slide14.xml><?xml version="1.0" encoding="utf-8"?>
+<p:sld xmlns:a="http://schemas.openxmlformats.org/drawingml/2006/main" xmlns:p="http://schemas.openxmlformats.org/presentationml/2006/main" xmlns:r="http://schemas.openxmlformats.org/officeDocument/2006/relationships">
+  <p:cSld>
+    <p:spTree>
+      <p:nvGrpSpPr>
+        <p:cNvPr id="1" name=""/>
+        <p:cNvGrpSpPr/>
+        <p:nvPr/>
+      </p:nvGrpSpPr>
+      <p:grpSpPr/>
+      <p:sp>
+        <p:nvSpPr>
+          <p:cNvPr id="2" name="TextBox 1"/>
+          <p:cNvSpPr txBox="1"/>
+          <p:nvPr/>
+        </p:nvSpPr>
+        <p:spPr>
+          <a:xfrm>
+            <a:off x="457200" y="320040"/>
+            <a:ext cx="8229600" cy="822960"/>
+          </a:xfrm>
+          <a:prstGeom prst="rect">
+            <a:avLst/>
+          </a:prstGeom>
+          <a:noFill/>
+        </p:spPr>
+        <p:txBody>
+          <a:bodyPr wrap="square">
+            <a:spAutoFit/>
+          </a:bodyPr>
+          <a:lstStyle/>
+          <a:p>
+            <a:r>
+              <a:rPr sz="2600" b="1">
+                <a:solidFill>
+                  <a:srgbClr val="0B3D2E"/>
+                </a:solidFill>
+              </a:rPr>
+              <a:t>❓ Preguntas frecuentes</a:t>
+            </a:r>
+          </a:p>
+        </p:txBody>
+      </p:sp>
+      <p:sp>
+        <p:nvSpPr>
+          <p:cNvPr id="3" name="TextBox 2"/>
+          <p:cNvSpPr txBox="1"/>
+          <p:nvPr/>
+        </p:nvSpPr>
+        <p:spPr>
+          <a:xfrm>
+            <a:off x="457200" y="1280160"/>
+            <a:ext cx="8229600" cy="4937760"/>
+          </a:xfrm>
+          <a:prstGeom prst="rect">
+            <a:avLst/>
+          </a:prstGeom>
+          <a:noFill/>
+        </p:spPr>
+        <p:txBody>
+          <a:bodyPr wrap="square">
+            <a:spAutoFit/>
+          </a:bodyPr>
+          <a:lstStyle/>
+          <a:p>
+            <a:pPr>
+              <a:spcAft>
+                <a:spcPts val="600"/>
+              </a:spcAft>
+            </a:pPr>
+            <a:r>
+              <a:rPr sz="1500">
+                <a:solidFill>
+                  <a:srgbClr val="22282E"/>
+                </a:solidFill>
+              </a:rPr>
+              <a:t>•  ❓ ¿Security Group o NACL?</a:t>
+            </a:r>
+          </a:p>
+          <a:p>
+            <a:pPr>
+              <a:spcAft>
+                <a:spcPts val="600"/>
+              </a:spcAft>
+            </a:pPr>
+            <a:r>
+              <a:rPr sz="1500">
+                <a:solidFill>
+                  <a:srgbClr val="22282E"/>
+                </a:solidFill>
+              </a:rPr>
+              <a:t>•  Usa ambos. El SG es stateful y va en la instancia (control fino); el NACL es stateless, va en la subred y sirve para bloqueos amplios (deny) que el SG no puede expresar.</a:t>
+            </a:r>
+          </a:p>
+          <a:p>
+            <a:pPr>
+              <a:spcAft>
+                <a:spcPts val="600"/>
+              </a:spcAft>
+            </a:pPr>
+            <a:r>
+              <a:rPr sz="1500">
+                <a:solidFill>
+                  <a:srgbClr val="22282E"/>
+                </a:solidFill>
+              </a:rPr>
+              <a:t>•  ❓ ¿GuardDuty reemplaza a un SIEM?</a:t>
+            </a:r>
+          </a:p>
+          <a:p>
+            <a:pPr>
+              <a:spcAft>
+                <a:spcPts val="600"/>
+              </a:spcAft>
+            </a:pPr>
+            <a:r>
+              <a:rPr sz="1500">
+                <a:solidFill>
+                  <a:srgbClr val="22282E"/>
+                </a:solidFill>
+              </a:rPr>
+              <a:t>•  No. GuardDuty detecta amenazas conocidas a partir de los logs de AWS; un SIEM correlaciona múltiples fuentes. Lo habitual es enviar los hallazgos de GuardDuty al SIEM.</a:t>
+            </a:r>
+          </a:p>
+          <a:p>
+            <a:pPr>
+              <a:spcAft>
+                <a:spcPts val="600"/>
+              </a:spcAft>
+            </a:pPr>
+            <a:r>
+              <a:rPr sz="1500">
+                <a:solidFill>
+                  <a:srgbClr val="22282E"/>
+                </a:solidFill>
+              </a:rPr>
+              <a:t>•  ❓ ¿Debo usar claves gestionadas por AWS o por el cliente (CMK)?</a:t>
+            </a:r>
+          </a:p>
+          <a:p>
+            <a:pPr>
+              <a:spcAft>
+                <a:spcPts val="600"/>
+              </a:spcAft>
+            </a:pPr>
+            <a:r>
+              <a:rPr sz="1500">
+                <a:solidFill>
+                  <a:srgbClr val="22282E"/>
+                </a:solidFill>
+              </a:rPr>
+              <a:t>•  Para control de auditoría, rotación y separación de deberes, usa claves gestionadas por el cliente (CMK). Las gestionadas por AWS son cómodas pero dan menos control sobre la política.</a:t>
+            </a:r>
+          </a:p>
+        </p:txBody>
+      </p:sp>
+    </p:spTree>
+  </p:cSld>
+  <p:clrMapOvr>
+    <a:masterClrMapping/>
+  </p:clrMapOvr>
+</p:sld>
+</file>
+
+<file path=ppt/slides/slide15.xml><?xml version="1.0" encoding="utf-8"?>
+<p:sld xmlns:a="http://schemas.openxmlformats.org/drawingml/2006/main" xmlns:p="http://schemas.openxmlformats.org/presentationml/2006/main" xmlns:r="http://schemas.openxmlformats.org/officeDocument/2006/relationships">
+  <p:cSld>
+    <p:spTree>
+      <p:nvGrpSpPr>
+        <p:cNvPr id="1" name=""/>
+        <p:cNvGrpSpPr/>
+        <p:nvPr/>
+      </p:nvGrpSpPr>
+      <p:grpSpPr/>
+      <p:sp>
+        <p:nvSpPr>
+          <p:cNvPr id="2" name="TextBox 1"/>
+          <p:cNvSpPr txBox="1"/>
+          <p:nvPr/>
+        </p:nvSpPr>
+        <p:spPr>
+          <a:xfrm>
+            <a:off x="457200" y="320040"/>
+            <a:ext cx="8229600" cy="822960"/>
+          </a:xfrm>
+          <a:prstGeom prst="rect">
+            <a:avLst/>
+          </a:prstGeom>
+          <a:noFill/>
+        </p:spPr>
+        <p:txBody>
+          <a:bodyPr wrap="square">
+            <a:spAutoFit/>
+          </a:bodyPr>
+          <a:lstStyle/>
+          <a:p>
+            <a:r>
+              <a:rPr sz="2600" b="1">
+                <a:solidFill>
+                  <a:srgbClr val="0B3D2E"/>
+                </a:solidFill>
+              </a:rPr>
+              <a:t>🔗 Referencias verificables y alcance</a:t>
+            </a:r>
+          </a:p>
+        </p:txBody>
+      </p:sp>
+      <p:sp>
+        <p:nvSpPr>
+          <p:cNvPr id="3" name="TextBox 2"/>
+          <p:cNvSpPr txBox="1"/>
+          <p:nvPr/>
+        </p:nvSpPr>
+        <p:spPr>
+          <a:xfrm>
+            <a:off x="457200" y="1280160"/>
+            <a:ext cx="8229600" cy="4937760"/>
+          </a:xfrm>
+          <a:prstGeom prst="rect">
+            <a:avLst/>
+          </a:prstGeom>
+          <a:noFill/>
+        </p:spPr>
+        <p:txBody>
+          <a:bodyPr wrap="square">
+            <a:spAutoFit/>
+          </a:bodyPr>
+          <a:lstStyle/>
+          <a:p>
+            <a:pPr>
+              <a:spcAft>
+                <a:spcPts val="600"/>
+              </a:spcAft>
+            </a:pPr>
+            <a:r>
+              <a:rPr sz="1500">
+                <a:solidFill>
+                  <a:srgbClr val="22282E"/>
+                </a:solidFill>
+              </a:rPr>
+              <a:t>•  AWS Well-Architected — Security Pillar. &lt;https://docs.aws.amazon.com/wellarchitected/latest/security-pillar/welcome.html&gt; — principios oficiales de diseño.</a:t>
+            </a:r>
+          </a:p>
+          <a:p>
+            <a:pPr>
+              <a:spcAft>
+                <a:spcPts val="600"/>
+              </a:spcAft>
+            </a:pPr>
+            <a:r>
+              <a:rPr sz="1500">
+                <a:solidFill>
+                  <a:srgbClr val="22282E"/>
+                </a:solidFill>
+              </a:rPr>
+              <a:t>•  Amazon S3 — Blocking public access. &lt;https://docs.aws.amazon.com/AmazonS3/latest/userguide/access-control-block-public-access.html&gt; — semántica oficial de los cuatro controles y ámbitos.</a:t>
+            </a:r>
+          </a:p>
+          <a:p>
+            <a:pPr>
+              <a:spcAft>
+                <a:spcPts val="600"/>
+              </a:spcAft>
+            </a:pPr>
+            <a:r>
+              <a:rPr sz="1500">
+                <a:solidFill>
+                  <a:srgbClr val="22282E"/>
+                </a:solidFill>
+              </a:rPr>
+              <a:t>•  AWS IAM policy evaluation. &lt;https://docs.aws.amazon.com/IAM/latest/UserGuide/referencepoliciesevaluation-logic.html&gt; — base para acceso efectivo de identidad y recurso.</a:t>
+            </a:r>
+          </a:p>
+          <a:p>
+            <a:pPr>
+              <a:spcAft>
+                <a:spcPts val="600"/>
+              </a:spcAft>
+            </a:pPr>
+            <a:r>
+              <a:rPr sz="1500">
+                <a:solidFill>
+                  <a:srgbClr val="22282E"/>
+                </a:solidFill>
+              </a:rPr>
+              <a:t>•  Amazon GuardDuty. &lt;https://docs.aws.amazon.com/guardduty/&gt; — fuentes, planes y operación oficial; no garantiza detectar toda actividad adversaria.</a:t>
+            </a:r>
+          </a:p>
+          <a:p>
+            <a:pPr>
+              <a:spcAft>
+                <a:spcPts val="600"/>
+              </a:spcAft>
+            </a:pPr>
+            <a:r>
+              <a:rPr sz="1500">
+                <a:solidFill>
+                  <a:srgbClr val="22282E"/>
+                </a:solidFill>
+              </a:rPr>
+              <a:t>•  CIS AWS Foundations Benchmark. &lt;https://www.cisecurity.org/benchmark/amazonwebservices&gt; — baseline independiente de configuración, no evaluación total de arquitectura.</a:t>
+            </a:r>
+          </a:p>
+          <a:p>
+            <a:pPr>
+              <a:spcAft>
+                <a:spcPts val="600"/>
+              </a:spcAft>
+            </a:pPr>
+            <a:r>
+              <a:rPr sz="1500">
+                <a:solidFill>
+                  <a:srgbClr val="22282E"/>
+                </a:solidFill>
+              </a:rPr>
+              <a:t>•  Prowler. &lt;https://github.com/prowler-cloud/prowler&gt; — automatiza checks; validar alcance, versión y permisos del rol auditor.</a:t>
+            </a:r>
+          </a:p>
+        </p:txBody>
+      </p:sp>
+    </p:spTree>
+  </p:cSld>
+  <p:clrMapOvr>
+    <a:masterClrMapping/>
+  </p:clrMapOvr>
+</p:sld>
+</file>
+
+<file path=ppt/slides/slide16.xml><?xml version="1.0" encoding="utf-8"?>
+<p:sld xmlns:a="http://schemas.openxmlformats.org/drawingml/2006/main" xmlns:p="http://schemas.openxmlformats.org/presentationml/2006/main" xmlns:r="http://schemas.openxmlformats.org/officeDocument/2006/relationships">
+  <p:cSld>
+    <p:spTree>
+      <p:nvGrpSpPr>
+        <p:cNvPr id="1" name=""/>
+        <p:cNvGrpSpPr/>
+        <p:nvPr/>
+      </p:nvGrpSpPr>
+      <p:grpSpPr/>
+      <p:sp>
+        <p:nvSpPr>
+          <p:cNvPr id="2" name="TextBox 1"/>
+          <p:cNvSpPr txBox="1"/>
+          <p:nvPr/>
+        </p:nvSpPr>
+        <p:spPr>
+          <a:xfrm>
+            <a:off x="457200" y="274320"/>
+            <a:ext cx="8229600" cy="640080"/>
+          </a:xfrm>
+          <a:prstGeom prst="rect">
+            <a:avLst/>
+          </a:prstGeom>
+          <a:noFill/>
+        </p:spPr>
+        <p:txBody>
+          <a:bodyPr wrap="square">
+            <a:spAutoFit/>
+          </a:bodyPr>
+          <a:lstStyle/>
+          <a:p>
+            <a:r>
+              <a:rPr sz="2200" b="1">
+                <a:solidFill>
+                  <a:srgbClr val="0B3D2E"/>
+                </a:solidFill>
+              </a:rPr>
+              <a:t>Diagrama de la clase</a:t>
+            </a:r>
+          </a:p>
+        </p:txBody>
+      </p:sp>
+      <p:pic>
+        <p:nvPicPr>
+          <p:cNvPr id="3" name="Picture 2" descr="8e1c3ba7efa9c185.png"/>
+          <p:cNvPicPr>
+            <a:picLocks noChangeAspect="1"/>
+          </p:cNvPicPr>
+          <p:nvPr/>
+        </p:nvPicPr>
+        <p:blipFill>
+          <a:blip r:embed="rId2"/>
+          <a:stretch>
+            <a:fillRect/>
+          </a:stretch>
+        </p:blipFill>
+        <p:spPr>
+          <a:xfrm>
+            <a:off x="2241202" y="1097280"/>
+            <a:ext cx="4661595" cy="5303520"/>
+          </a:xfrm>
+          <a:prstGeom prst="rect">
+            <a:avLst/>
+          </a:prstGeom>
+        </p:spPr>
+      </p:pic>
     </p:spTree>
   </p:cSld>
   <p:clrMapOvr>
@@ -4137,7 +4723,7 @@
                   <a:srgbClr val="0B3D2E"/>
                 </a:solidFill>
               </a:rPr>
-              <a:t>📖 Definiciones y características</a:t>
+              <a:t>🧠 Explicación en profundidad</a:t>
             </a:r>
           </a:p>
         </p:txBody>
@@ -4175,97 +4761,82 @@
                   <a:srgbClr val="22282E"/>
                 </a:solidFill>
               </a:rPr>
-              <a:t>•  VPC: red virtual aislada dentro de AWS. Clave: subredes privadas sin ruta a Internet reducen exposición.</a:t>
-            </a:r>
-          </a:p>
-          <a:p>
-            <a:pPr>
-              <a:spcAft>
-                <a:spcPts val="600"/>
-              </a:spcAft>
-            </a:pPr>
-            <a:r>
-              <a:rPr sz="1500">
-                <a:solidFill>
-                  <a:srgbClr val="22282E"/>
-                </a:solidFill>
-              </a:rPr>
-              <a:t>•  Security Group: firewall stateful a nivel de instancia. Clave: solo permite (allow); denegar es no incluir la regla.</a:t>
-            </a:r>
-          </a:p>
-          <a:p>
-            <a:pPr>
-              <a:spcAft>
-                <a:spcPts val="600"/>
-              </a:spcAft>
-            </a:pPr>
-            <a:r>
-              <a:rPr sz="1500">
-                <a:solidFill>
-                  <a:srgbClr val="22282E"/>
-                </a:solidFill>
-              </a:rPr>
-              <a:t>•  NACL: firewall stateless a nivel de subred. Clave: permite reglas deny explícitas, complementa a los SG.</a:t>
-            </a:r>
-          </a:p>
-          <a:p>
-            <a:pPr>
-              <a:spcAft>
-                <a:spcPts val="600"/>
-              </a:spcAft>
-            </a:pPr>
-            <a:r>
-              <a:rPr sz="1500">
-                <a:solidFill>
-                  <a:srgbClr val="22282E"/>
-                </a:solidFill>
-              </a:rPr>
-              <a:t>•  S3 Block Public Access: interruptor de cuenta/bucket que anula ACLs y políticas públicas. Clave: actívalo a nivel de cuenta.</a:t>
-            </a:r>
-          </a:p>
-          <a:p>
-            <a:pPr>
-              <a:spcAft>
-                <a:spcPts val="600"/>
-              </a:spcAft>
-            </a:pPr>
-            <a:r>
-              <a:rPr sz="1500">
-                <a:solidFill>
-                  <a:srgbClr val="22282E"/>
-                </a:solidFill>
-              </a:rPr>
-              <a:t>•  KMS: servicio de gestión de claves. Clave: separa quién administra la clave de quién la usa; auditable vía CloudTrail.</a:t>
-            </a:r>
-          </a:p>
-          <a:p>
-            <a:pPr>
-              <a:spcAft>
-                <a:spcPts val="600"/>
-              </a:spcAft>
-            </a:pPr>
-            <a:r>
-              <a:rPr sz="1500">
-                <a:solidFill>
-                  <a:srgbClr val="22282E"/>
-                </a:solidFill>
-              </a:rPr>
-              <a:t>•  GuardDuty: detección de amenazas que analiza CloudTrail, DNS y Flow Logs. Clave: sin agentes, se activa con un clic.</a:t>
-            </a:r>
-          </a:p>
-          <a:p>
-            <a:pPr>
-              <a:spcAft>
-                <a:spcPts val="600"/>
-              </a:spcAft>
-            </a:pPr>
-            <a:r>
-              <a:rPr sz="1500">
-                <a:solidFill>
-                  <a:srgbClr val="22282E"/>
-                </a:solidFill>
-              </a:rPr>
-              <a:t>•  Security Hub: agrega hallazgos y ejecuta el CIS/AWS FSBP benchmark. Clave: panel único de postura.</a:t>
+              <a:t>•  AWS organiza seguridad a través de cuentas, regiones y servicios. Una arquitectura defendible separa cargas y entornos en cuentas, aplica guardrails organizacionales y luego configura controles de…</a:t>
+            </a:r>
+          </a:p>
+          <a:p>
+            <a:pPr>
+              <a:spcAft>
+                <a:spcPts val="600"/>
+              </a:spcAft>
+            </a:pPr>
+            <a:r>
+              <a:rPr sz="1500">
+                <a:solidFill>
+                  <a:srgbClr val="22282E"/>
+                </a:solidFill>
+              </a:rPr>
+              <a:t>•  La lectura es descendente: organización limita el espacio de decisión; IAM autoriza API; VPC define conectividad; KMS añade control criptográfico; logs observan; GuardDuty y Security Hub interpretan…</a:t>
+            </a:r>
+          </a:p>
+          <a:p>
+            <a:pPr>
+              <a:spcAft>
+                <a:spcPts val="600"/>
+              </a:spcAft>
+            </a:pPr>
+            <a:r>
+              <a:rPr sz="1500">
+                <a:solidFill>
+                  <a:srgbClr val="22282E"/>
+                </a:solidFill>
+              </a:rPr>
+              <a:t>•  Una subred no es «pública» por su nombre, sino por rutas, gateway y posibilidad de asignar dirección accesible. Security Groups son stateful y expresan permisos sobre interfaces; NACL operan…</a:t>
+            </a:r>
+          </a:p>
+          <a:p>
+            <a:pPr>
+              <a:spcAft>
+                <a:spcPts val="600"/>
+              </a:spcAft>
+            </a:pPr>
+            <a:r>
+              <a:rPr sz="1500">
+                <a:solidFill>
+                  <a:srgbClr val="22282E"/>
+                </a:solidFill>
+              </a:rPr>
+              <a:t>•  S3 Block Public Access combina controles en organización, cuenta, bucket y access point; AWS aplica la combinación más restrictiva relevante. Esto ayuda a impedir políticas o ACL públicas, pero no…</a:t>
+            </a:r>
+          </a:p>
+          <a:p>
+            <a:pPr>
+              <a:spcAft>
+                <a:spcPts val="600"/>
+              </a:spcAft>
+            </a:pPr>
+            <a:r>
+              <a:rPr sz="1500">
+                <a:solidFill>
+                  <a:srgbClr val="22282E"/>
+                </a:solidFill>
+              </a:rPr>
+              <a:t>•  KMS protege claves y registra uso, pero cifrado en reposo no limita a un principal que tiene simultáneamente permiso al dato y a Decrypt. La separación de administración y uso, condiciones y política…</a:t>
+            </a:r>
+          </a:p>
+          <a:p>
+            <a:pPr>
+              <a:spcAft>
+                <a:spcPts val="600"/>
+              </a:spcAft>
+            </a:pPr>
+            <a:r>
+              <a:rPr sz="1500">
+                <a:solidFill>
+                  <a:srgbClr val="22282E"/>
+                </a:solidFill>
+              </a:rPr>
+              <a:t>•  CloudTrail registra actividades cubiertas; management events y data events tienen cobertura y costo distintos. VPC Flow Logs son metadatos, no contenido. GuardDuty procesa fuentes administradas según…</a:t>
             </a:r>
           </a:p>
         </p:txBody>
@@ -4316,7 +4887,7 @@
                   <a:srgbClr val="0B3D2E"/>
                 </a:solidFill>
               </a:rPr>
-              <a:t>🧰 Herramientas y preparación</a:t>
+              <a:t>📖 Definiciones y características</a:t>
             </a:r>
           </a:p>
         </p:txBody>
@@ -4354,67 +4925,97 @@
                   <a:srgbClr val="22282E"/>
                 </a:solidFill>
               </a:rPr>
-              <a:t>•  CLI aws configurada con un perfil de laboratorio y MFA.</a:t>
-            </a:r>
-          </a:p>
-          <a:p>
-            <a:pPr>
-              <a:spcAft>
-                <a:spcPts val="600"/>
-              </a:spcAft>
-            </a:pPr>
-            <a:r>
-              <a:rPr sz="1500">
-                <a:solidFill>
-                  <a:srgbClr val="22282E"/>
-                </a:solidFill>
-              </a:rPr>
-              <a:t>•  Prowler para el CIS AWS Benchmark: pip install prowler.</a:t>
-            </a:r>
-          </a:p>
-          <a:p>
-            <a:pPr>
-              <a:spcAft>
-                <a:spcPts val="600"/>
-              </a:spcAft>
-            </a:pPr>
-            <a:r>
-              <a:rPr sz="1500">
-                <a:solidFill>
-                  <a:srgbClr val="22282E"/>
-                </a:solidFill>
-              </a:rPr>
-              <a:t>•  Cuenta de laboratorio dedicada; no uses la cuenta de producción.</a:t>
-            </a:r>
-          </a:p>
-          <a:p>
-            <a:pPr>
-              <a:spcAft>
-                <a:spcPts val="600"/>
-              </a:spcAft>
-            </a:pPr>
-            <a:r>
-              <a:rPr sz="1500">
-                <a:solidFill>
-                  <a:srgbClr val="22282E"/>
-                </a:solidFill>
-              </a:rPr>
-              <a:t>•  aws s3control get-public-access-block --account-id 123456789012</a:t>
-            </a:r>
-          </a:p>
-          <a:p>
-            <a:pPr>
-              <a:spcAft>
-                <a:spcPts val="600"/>
-              </a:spcAft>
-            </a:pPr>
-            <a:r>
-              <a:rPr sz="1500">
-                <a:solidFill>
-                  <a:srgbClr val="22282E"/>
-                </a:solidFill>
-              </a:rPr>
-              <a:t>•  aws guardduty create-detector --enable</a:t>
+              <a:t>•  VPC: red virtual aislada dentro de AWS. Clave: subredes privadas sin ruta a Internet reducen exposición.</a:t>
+            </a:r>
+          </a:p>
+          <a:p>
+            <a:pPr>
+              <a:spcAft>
+                <a:spcPts val="600"/>
+              </a:spcAft>
+            </a:pPr>
+            <a:r>
+              <a:rPr sz="1500">
+                <a:solidFill>
+                  <a:srgbClr val="22282E"/>
+                </a:solidFill>
+              </a:rPr>
+              <a:t>•  Security Group: firewall stateful a nivel de instancia. Clave: solo permite (allow); denegar es no incluir la regla.</a:t>
+            </a:r>
+          </a:p>
+          <a:p>
+            <a:pPr>
+              <a:spcAft>
+                <a:spcPts val="600"/>
+              </a:spcAft>
+            </a:pPr>
+            <a:r>
+              <a:rPr sz="1500">
+                <a:solidFill>
+                  <a:srgbClr val="22282E"/>
+                </a:solidFill>
+              </a:rPr>
+              <a:t>•  NACL: firewall stateless a nivel de subred. Clave: permite reglas deny explícitas, complementa a los SG.</a:t>
+            </a:r>
+          </a:p>
+          <a:p>
+            <a:pPr>
+              <a:spcAft>
+                <a:spcPts val="600"/>
+              </a:spcAft>
+            </a:pPr>
+            <a:r>
+              <a:rPr sz="1500">
+                <a:solidFill>
+                  <a:srgbClr val="22282E"/>
+                </a:solidFill>
+              </a:rPr>
+              <a:t>•  S3 Block Public Access: conjunto de cuatro controles aplicables en varios ámbitos. Clave: bloquea formas de acceso público, pero no reemplaza la revisión de acceso autenticado y compartido.</a:t>
+            </a:r>
+          </a:p>
+          <a:p>
+            <a:pPr>
+              <a:spcAft>
+                <a:spcPts val="600"/>
+              </a:spcAft>
+            </a:pPr>
+            <a:r>
+              <a:rPr sz="1500">
+                <a:solidFill>
+                  <a:srgbClr val="22282E"/>
+                </a:solidFill>
+              </a:rPr>
+              <a:t>•  KMS: servicio de gestión de claves. Clave: separa quién administra la clave de quién la usa; auditable vía CloudTrail.</a:t>
+            </a:r>
+          </a:p>
+          <a:p>
+            <a:pPr>
+              <a:spcAft>
+                <a:spcPts val="600"/>
+              </a:spcAft>
+            </a:pPr>
+            <a:r>
+              <a:rPr sz="1500">
+                <a:solidFill>
+                  <a:srgbClr val="22282E"/>
+                </a:solidFill>
+              </a:rPr>
+              <a:t>•  GuardDuty: servicio administrado de detección que usa fuentes y planes documentados. Clave: cobertura, región, características habilitadas y contexto determinan los hallazgos.</a:t>
+            </a:r>
+          </a:p>
+          <a:p>
+            <a:pPr>
+              <a:spcAft>
+                <a:spcPts val="600"/>
+              </a:spcAft>
+            </a:pPr>
+            <a:r>
+              <a:rPr sz="1500">
+                <a:solidFill>
+                  <a:srgbClr val="22282E"/>
+                </a:solidFill>
+              </a:rPr>
+              <a:t>•  Security Hub: servicio de postura y agregación de hallazgos. Clave: centraliza estándares y productos, pero requiere priorización y remediación fuera del panel.</a:t>
             </a:r>
           </a:p>
         </p:txBody>
@@ -4465,7 +5066,7 @@
                   <a:srgbClr val="0B3D2E"/>
                 </a:solidFill>
               </a:rPr>
-              <a:t>🧪 Laboratorio guiado</a:t>
+              <a:t>🔍 Caso razonado — bucket cifrado pero expuesto a una cuenta externa</a:t>
             </a:r>
           </a:p>
         </p:txBody>
@@ -4503,97 +5104,22 @@
                   <a:srgbClr val="22282E"/>
                 </a:solidFill>
               </a:rPr>
-              <a:t>•  Crea una VPC con una subred pública (con Internet Gateway) y una privada (sin ruta directa a Internet).</a:t>
-            </a:r>
-          </a:p>
-          <a:p>
-            <a:pPr>
-              <a:spcAft>
-                <a:spcPts val="600"/>
-              </a:spcAft>
-            </a:pPr>
-            <a:r>
-              <a:rPr sz="1500">
-                <a:solidFill>
-                  <a:srgbClr val="22282E"/>
-                </a:solidFill>
-              </a:rPr>
-              <a:t>•  Lanza una instancia en la subred privada y comprueba que no es accesible desde Internet; da acceso solo vía un bastión o SSM Session Manager.</a:t>
-            </a:r>
-          </a:p>
-          <a:p>
-            <a:pPr>
-              <a:spcAft>
-                <a:spcPts val="600"/>
-              </a:spcAft>
-            </a:pPr>
-            <a:r>
-              <a:rPr sz="1500">
-                <a:solidFill>
-                  <a:srgbClr val="22282E"/>
-                </a:solidFill>
-              </a:rPr>
-              <a:t>•  Crea un bucket S3, sube un objeto y verifica que Block Public Access está activo a nivel de cuenta y bucket. Intenta hacerlo público y confirma que se bloquea.</a:t>
-            </a:r>
-          </a:p>
-          <a:p>
-            <a:pPr>
-              <a:spcAft>
-                <a:spcPts val="600"/>
-              </a:spcAft>
-            </a:pPr>
-            <a:r>
-              <a:rPr sz="1500">
-                <a:solidFill>
-                  <a:srgbClr val="22282E"/>
-                </a:solidFill>
-              </a:rPr>
-              <a:t>•  Activa cifrado por defecto con una clave KMS gestionada por ti y revisa la política de la clave.</a:t>
-            </a:r>
-          </a:p>
-          <a:p>
-            <a:pPr>
-              <a:spcAft>
-                <a:spcPts val="600"/>
-              </a:spcAft>
-            </a:pPr>
-            <a:r>
-              <a:rPr sz="1500">
-                <a:solidFill>
-                  <a:srgbClr val="22282E"/>
-                </a:solidFill>
-              </a:rPr>
-              <a:t>•  Habilita CloudTrail multi-región con un bucket dedicado y cifrado, y VPC Flow Logs hacia CloudWatch.</a:t>
-            </a:r>
-          </a:p>
-          <a:p>
-            <a:pPr>
-              <a:spcAft>
-                <a:spcPts val="600"/>
-              </a:spcAft>
-            </a:pPr>
-            <a:r>
-              <a:rPr sz="1500">
-                <a:solidFill>
-                  <a:srgbClr val="22282E"/>
-                </a:solidFill>
-              </a:rPr>
-              <a:t>•  Activa GuardDuty, Config (con reglas gestionadas) y Security Hub con el estándar CIS.</a:t>
-            </a:r>
-          </a:p>
-          <a:p>
-            <a:pPr>
-              <a:spcAft>
-                <a:spcPts val="600"/>
-              </a:spcAft>
-            </a:pPr>
-            <a:r>
-              <a:rPr sz="1500">
-                <a:solidFill>
-                  <a:srgbClr val="22282E"/>
-                </a:solidFill>
-              </a:rPr>
-              <a:t>•  Ejecuta prowler aws --compliance cis2.0aws y compara los hallazgos con lo que muestra Security Hub. Corrige al menos tres hallazgos de severidad alta y vuelve a ejecutar.</a:t>
+              <a:t>•  Un bucket tiene BPA activo y cifrado KMS, pero una bucket policy permite lectura a una cuenta asociada completa. No es «público» en el sentido de acceso anónimo y BPA puede no bloquear el patrón…</a:t>
+            </a:r>
+          </a:p>
+          <a:p>
+            <a:pPr>
+              <a:spcAft>
+                <a:spcPts val="600"/>
+              </a:spcAft>
+            </a:pPr>
+            <a:r>
+              <a:rPr sz="1500">
+                <a:solidFill>
+                  <a:srgbClr val="22282E"/>
+                </a:solidFill>
+              </a:rPr>
+              <a:t>•  Después verifica que la cuenta externa también posee permiso KMS, revisa CloudTrail data events disponibles y prueba acceso permitido y denegado. El caso demuestra que cifrado, BPA y policy resuelven…</a:t>
             </a:r>
           </a:p>
         </p:txBody>
@@ -4644,7 +5170,7 @@
                   <a:srgbClr val="0B3D2E"/>
                 </a:solidFill>
               </a:rPr>
-              <a:t>✍️ Ejercicios</a:t>
+              <a:t>✅ Criterio de dominio</a:t>
             </a:r>
           </a:p>
         </p:txBody>
@@ -4682,82 +5208,7 @@
                   <a:srgbClr val="22282E"/>
                 </a:solidFill>
               </a:rPr>
-              <a:t>•  Escribe una regla de security group que permita SSH solo desde tu IP y HTTPS desde cualquier origen.</a:t>
-            </a:r>
-          </a:p>
-          <a:p>
-            <a:pPr>
-              <a:spcAft>
-                <a:spcPts val="600"/>
-              </a:spcAft>
-            </a:pPr>
-            <a:r>
-              <a:rPr sz="1500">
-                <a:solidFill>
-                  <a:srgbClr val="22282E"/>
-                </a:solidFill>
-              </a:rPr>
-              <a:t>•  Crea una política de bucket que exija cifrado en las peticiones PutObject.</a:t>
-            </a:r>
-          </a:p>
-          <a:p>
-            <a:pPr>
-              <a:spcAft>
-                <a:spcPts val="600"/>
-              </a:spcAft>
-            </a:pPr>
-            <a:r>
-              <a:rPr sz="1500">
-                <a:solidFill>
-                  <a:srgbClr val="22282E"/>
-                </a:solidFill>
-              </a:rPr>
-              <a:t>•  Configura una regla de Config que marque como no conforme cualquier volumen EBS sin cifrar.</a:t>
-            </a:r>
-          </a:p>
-          <a:p>
-            <a:pPr>
-              <a:spcAft>
-                <a:spcPts val="600"/>
-              </a:spcAft>
-            </a:pPr>
-            <a:r>
-              <a:rPr sz="1500">
-                <a:solidFill>
-                  <a:srgbClr val="22282E"/>
-                </a:solidFill>
-              </a:rPr>
-              <a:t>•  Interpreta un hallazgo de GuardDuty de tipo UnauthorizedAccess:IAMUser/InstanceCredentialExfiltration.</a:t>
-            </a:r>
-          </a:p>
-          <a:p>
-            <a:pPr>
-              <a:spcAft>
-                <a:spcPts val="600"/>
-              </a:spcAft>
-            </a:pPr>
-            <a:r>
-              <a:rPr sz="1500">
-                <a:solidFill>
-                  <a:srgbClr val="22282E"/>
-                </a:solidFill>
-              </a:rPr>
-              <a:t>•  Diseña una arquitectura de cuentas con una cuenta de logging centralizado.</a:t>
-            </a:r>
-          </a:p>
-          <a:p>
-            <a:pPr>
-              <a:spcAft>
-                <a:spcPts val="600"/>
-              </a:spcAft>
-            </a:pPr>
-            <a:r>
-              <a:rPr sz="1500">
-                <a:solidFill>
-                  <a:srgbClr val="22282E"/>
-                </a:solidFill>
-              </a:rPr>
-              <a:t>•  Habilita el acceso a instancias vía SSM en lugar de SSH y explica la ventaja de seguridad.</a:t>
+              <a:t>•  Dominas la clase cuando puedes seguir una solicitud desde cuenta y principal hasta ruta, SG, política de recurso y KMS; distinguir prevención, registro y detección; y documentar cobertura regional y…</a:t>
             </a:r>
           </a:p>
         </p:txBody>
@@ -4808,7 +5259,7 @@
                   <a:srgbClr val="0B3D2E"/>
                 </a:solidFill>
               </a:rPr>
-              <a:t>📝 Reto verificable</a:t>
+              <a:t>🧰 Herramientas y preparación</a:t>
             </a:r>
           </a:p>
         </p:txBody>
@@ -4846,67 +5297,37 @@
                   <a:srgbClr val="22282E"/>
                 </a:solidFill>
               </a:rPr>
-              <a:t>•  Toma una cuenta de laboratorio "recién creada" y llévala a una postura base: sin buckets públicos,</a:t>
-            </a:r>
-          </a:p>
-          <a:p>
-            <a:pPr>
-              <a:spcAft>
-                <a:spcPts val="600"/>
-              </a:spcAft>
-            </a:pPr>
-            <a:r>
-              <a:rPr sz="1500">
-                <a:solidFill>
-                  <a:srgbClr val="22282E"/>
-                </a:solidFill>
-              </a:rPr>
-              <a:t>•  CloudTrail multi-región activo, GuardDuty y Security Hub habilitados, y cifrado por defecto en S3 y EBS.</a:t>
-            </a:r>
-          </a:p>
-          <a:p>
-            <a:pPr>
-              <a:spcAft>
-                <a:spcPts val="600"/>
-              </a:spcAft>
-            </a:pPr>
-            <a:r>
-              <a:rPr sz="1500">
-                <a:solidFill>
-                  <a:srgbClr val="22282E"/>
-                </a:solidFill>
-              </a:rPr>
-              <a:t>•  Criterio de aceptación: una ejecución de prowler aws --compliance cis2.0aws muestra 0</a:t>
-            </a:r>
-          </a:p>
-          <a:p>
-            <a:pPr>
-              <a:spcAft>
-                <a:spcPts val="600"/>
-              </a:spcAft>
-            </a:pPr>
-            <a:r>
-              <a:rPr sz="1500">
-                <a:solidFill>
-                  <a:srgbClr val="22282E"/>
-                </a:solidFill>
-              </a:rPr>
-              <a:t>•  hallazgos críticos/altos en las secciones de S3, logging y cifrado, y Security Hub reporta esos</a:t>
-            </a:r>
-          </a:p>
-          <a:p>
-            <a:pPr>
-              <a:spcAft>
-                <a:spcPts val="600"/>
-              </a:spcAft>
-            </a:pPr>
-            <a:r>
-              <a:rPr sz="1500">
-                <a:solidFill>
-                  <a:srgbClr val="22282E"/>
-                </a:solidFill>
-              </a:rPr>
-              <a:t>•  controles como PASSED.</a:t>
+              <a:t>•  CLI aws configurada con un perfil de laboratorio y MFA.</a:t>
+            </a:r>
+          </a:p>
+          <a:p>
+            <a:pPr>
+              <a:spcAft>
+                <a:spcPts val="600"/>
+              </a:spcAft>
+            </a:pPr>
+            <a:r>
+              <a:rPr sz="1500">
+                <a:solidFill>
+                  <a:srgbClr val="22282E"/>
+                </a:solidFill>
+              </a:rPr>
+              <a:t>•  Prowler para el CIS AWS Benchmark: pip install prowler.</a:t>
+            </a:r>
+          </a:p>
+          <a:p>
+            <a:pPr>
+              <a:spcAft>
+                <a:spcPts val="600"/>
+              </a:spcAft>
+            </a:pPr>
+            <a:r>
+              <a:rPr sz="1500">
+                <a:solidFill>
+                  <a:srgbClr val="22282E"/>
+                </a:solidFill>
+              </a:rPr>
+              <a:t>•  Cuenta de laboratorio dedicada; no uses la cuenta de producción.</a:t>
             </a:r>
           </a:p>
         </p:txBody>
